--- a/Talent_OS_Presentation.pptx
+++ b/Talent_OS_Presentation.pptx
@@ -5,16 +5,16 @@
     <p:sldMasterId id="2147483648" r:id="rId1"/>
   </p:sldMasterIdLst>
   <p:sldIdLst>
-    <p:sldId id="256" r:id="rId7"/>
-    <p:sldId id="257" r:id="rId8"/>
-    <p:sldId id="258" r:id="rId9"/>
-    <p:sldId id="259" r:id="rId10"/>
-    <p:sldId id="260" r:id="rId11"/>
-    <p:sldId id="261" r:id="rId12"/>
-    <p:sldId id="262" r:id="rId13"/>
-    <p:sldId id="263" r:id="rId14"/>
-    <p:sldId id="264" r:id="rId15"/>
-    <p:sldId id="265" r:id="rId16"/>
+    <p:sldId id="256" r:id="rId2"/>
+    <p:sldId id="257" r:id="rId3"/>
+    <p:sldId id="258" r:id="rId4"/>
+    <p:sldId id="259" r:id="rId5"/>
+    <p:sldId id="260" r:id="rId6"/>
+    <p:sldId id="261" r:id="rId7"/>
+    <p:sldId id="262" r:id="rId8"/>
+    <p:sldId id="263" r:id="rId9"/>
+    <p:sldId id="264" r:id="rId10"/>
+    <p:sldId id="265" r:id="rId11"/>
   </p:sldIdLst>
   <p:sldSz cx="9144000" cy="6858000" type="screen4x3"/>
   <p:notesSz cx="6858000" cy="9144000"/>
@@ -113,6 +113,22 @@
       </a:defRPr>
     </a:lvl9pPr>
   </p:defaultTextStyle>
+  <p:extLst>
+    <p:ext uri="{EFAFB233-063F-42B5-8137-9DF3F51BA10A}">
+      <p15:sldGuideLst xmlns:p15="http://schemas.microsoft.com/office/powerpoint/2012/main">
+        <p15:guide id="1" orient="horz" pos="2160">
+          <p15:clr>
+            <a:srgbClr val="A4A3A4"/>
+          </p15:clr>
+        </p15:guide>
+        <p15:guide id="2" pos="2880">
+          <p15:clr>
+            <a:srgbClr val="A4A3A4"/>
+          </p15:clr>
+        </p15:guide>
+      </p15:sldGuideLst>
+    </p:ext>
+  </p:extLst>
 </p:presentation>
 </file>
 
@@ -154,10 +170,9 @@
           <a:lstStyle/>
           <a:p>
             <a:r>
-              <a:rPr lang="en-US" smtClean="0"/>
+              <a:rPr lang="en-US"/>
               <a:t>Click to edit Master title style</a:t>
             </a:r>
-            <a:endParaRPr lang="en-US"/>
           </a:p>
         </p:txBody>
       </p:sp>
@@ -273,10 +288,9 @@
           </a:lstStyle>
           <a:p>
             <a:r>
-              <a:rPr lang="en-US" smtClean="0"/>
+              <a:rPr lang="en-US"/>
               <a:t>Click to edit Master subtitle style</a:t>
             </a:r>
-            <a:endParaRPr lang="en-US"/>
           </a:p>
         </p:txBody>
       </p:sp>
@@ -297,7 +311,7 @@
           <a:p>
             <a:fld id="{5BCAD085-E8A6-8845-BD4E-CB4CCA059FC4}" type="datetimeFigureOut">
               <a:rPr lang="en-US" smtClean="0"/>
-              <a:t>1/27/13</a:t>
+              <a:t>6/26/2026</a:t>
             </a:fld>
             <a:endParaRPr lang="en-US"/>
           </a:p>
@@ -391,10 +405,9 @@
           <a:lstStyle/>
           <a:p>
             <a:r>
-              <a:rPr lang="en-US" smtClean="0"/>
+              <a:rPr lang="en-US"/>
               <a:t>Click to edit Master title style</a:t>
             </a:r>
-            <a:endParaRPr lang="en-US"/>
           </a:p>
         </p:txBody>
       </p:sp>
@@ -415,38 +428,37 @@
           <a:p>
             <a:pPr lvl="0"/>
             <a:r>
-              <a:rPr lang="en-US" smtClean="0"/>
+              <a:rPr lang="en-US"/>
               <a:t>Click to edit Master text styles</a:t>
             </a:r>
           </a:p>
           <a:p>
             <a:pPr lvl="1"/>
             <a:r>
-              <a:rPr lang="en-US" smtClean="0"/>
+              <a:rPr lang="en-US"/>
               <a:t>Second level</a:t>
             </a:r>
           </a:p>
           <a:p>
             <a:pPr lvl="2"/>
             <a:r>
-              <a:rPr lang="en-US" smtClean="0"/>
+              <a:rPr lang="en-US"/>
               <a:t>Third level</a:t>
             </a:r>
           </a:p>
           <a:p>
             <a:pPr lvl="3"/>
             <a:r>
-              <a:rPr lang="en-US" smtClean="0"/>
+              <a:rPr lang="en-US"/>
               <a:t>Fourth level</a:t>
             </a:r>
           </a:p>
           <a:p>
             <a:pPr lvl="4"/>
             <a:r>
-              <a:rPr lang="en-US" smtClean="0"/>
+              <a:rPr lang="en-US"/>
               <a:t>Fifth level</a:t>
             </a:r>
-            <a:endParaRPr lang="en-US"/>
           </a:p>
         </p:txBody>
       </p:sp>
@@ -467,7 +479,7 @@
           <a:p>
             <a:fld id="{5BCAD085-E8A6-8845-BD4E-CB4CCA059FC4}" type="datetimeFigureOut">
               <a:rPr lang="en-US" smtClean="0"/>
-              <a:t>1/27/13</a:t>
+              <a:t>6/26/2026</a:t>
             </a:fld>
             <a:endParaRPr lang="en-US"/>
           </a:p>
@@ -566,10 +578,9 @@
           <a:lstStyle/>
           <a:p>
             <a:r>
-              <a:rPr lang="en-US" smtClean="0"/>
+              <a:rPr lang="en-US"/>
               <a:t>Click to edit Master title style</a:t>
             </a:r>
-            <a:endParaRPr lang="en-US"/>
           </a:p>
         </p:txBody>
       </p:sp>
@@ -595,38 +606,37 @@
           <a:p>
             <a:pPr lvl="0"/>
             <a:r>
-              <a:rPr lang="en-US" smtClean="0"/>
+              <a:rPr lang="en-US"/>
               <a:t>Click to edit Master text styles</a:t>
             </a:r>
           </a:p>
           <a:p>
             <a:pPr lvl="1"/>
             <a:r>
-              <a:rPr lang="en-US" smtClean="0"/>
+              <a:rPr lang="en-US"/>
               <a:t>Second level</a:t>
             </a:r>
           </a:p>
           <a:p>
             <a:pPr lvl="2"/>
             <a:r>
-              <a:rPr lang="en-US" smtClean="0"/>
+              <a:rPr lang="en-US"/>
               <a:t>Third level</a:t>
             </a:r>
           </a:p>
           <a:p>
             <a:pPr lvl="3"/>
             <a:r>
-              <a:rPr lang="en-US" smtClean="0"/>
+              <a:rPr lang="en-US"/>
               <a:t>Fourth level</a:t>
             </a:r>
           </a:p>
           <a:p>
             <a:pPr lvl="4"/>
             <a:r>
-              <a:rPr lang="en-US" smtClean="0"/>
+              <a:rPr lang="en-US"/>
               <a:t>Fifth level</a:t>
             </a:r>
-            <a:endParaRPr lang="en-US"/>
           </a:p>
         </p:txBody>
       </p:sp>
@@ -647,7 +657,7 @@
           <a:p>
             <a:fld id="{5BCAD085-E8A6-8845-BD4E-CB4CCA059FC4}" type="datetimeFigureOut">
               <a:rPr lang="en-US" smtClean="0"/>
-              <a:t>1/27/13</a:t>
+              <a:t>6/26/2026</a:t>
             </a:fld>
             <a:endParaRPr lang="en-US"/>
           </a:p>
@@ -741,10 +751,9 @@
           <a:lstStyle/>
           <a:p>
             <a:r>
-              <a:rPr lang="en-US" smtClean="0"/>
+              <a:rPr lang="en-US"/>
               <a:t>Click to edit Master title style</a:t>
             </a:r>
-            <a:endParaRPr lang="en-US"/>
           </a:p>
         </p:txBody>
       </p:sp>
@@ -765,38 +774,37 @@
           <a:p>
             <a:pPr lvl="0"/>
             <a:r>
-              <a:rPr lang="en-US" smtClean="0"/>
+              <a:rPr lang="en-US"/>
               <a:t>Click to edit Master text styles</a:t>
             </a:r>
           </a:p>
           <a:p>
             <a:pPr lvl="1"/>
             <a:r>
-              <a:rPr lang="en-US" smtClean="0"/>
+              <a:rPr lang="en-US"/>
               <a:t>Second level</a:t>
             </a:r>
           </a:p>
           <a:p>
             <a:pPr lvl="2"/>
             <a:r>
-              <a:rPr lang="en-US" smtClean="0"/>
+              <a:rPr lang="en-US"/>
               <a:t>Third level</a:t>
             </a:r>
           </a:p>
           <a:p>
             <a:pPr lvl="3"/>
             <a:r>
-              <a:rPr lang="en-US" smtClean="0"/>
+              <a:rPr lang="en-US"/>
               <a:t>Fourth level</a:t>
             </a:r>
           </a:p>
           <a:p>
             <a:pPr lvl="4"/>
             <a:r>
-              <a:rPr lang="en-US" smtClean="0"/>
+              <a:rPr lang="en-US"/>
               <a:t>Fifth level</a:t>
             </a:r>
-            <a:endParaRPr lang="en-US"/>
           </a:p>
         </p:txBody>
       </p:sp>
@@ -817,7 +825,7 @@
           <a:p>
             <a:fld id="{5BCAD085-E8A6-8845-BD4E-CB4CCA059FC4}" type="datetimeFigureOut">
               <a:rPr lang="en-US" smtClean="0"/>
-              <a:t>1/27/13</a:t>
+              <a:t>6/26/2026</a:t>
             </a:fld>
             <a:endParaRPr lang="en-US"/>
           </a:p>
@@ -920,10 +928,9 @@
           </a:lstStyle>
           <a:p>
             <a:r>
-              <a:rPr lang="en-US" smtClean="0"/>
+              <a:rPr lang="en-US"/>
               <a:t>Click to edit Master title style</a:t>
             </a:r>
-            <a:endParaRPr lang="en-US"/>
           </a:p>
         </p:txBody>
       </p:sp>
@@ -1040,7 +1047,7 @@
           <a:p>
             <a:pPr lvl="0"/>
             <a:r>
-              <a:rPr lang="en-US" smtClean="0"/>
+              <a:rPr lang="en-US"/>
               <a:t>Click to edit Master text styles</a:t>
             </a:r>
           </a:p>
@@ -1063,7 +1070,7 @@
           <a:p>
             <a:fld id="{5BCAD085-E8A6-8845-BD4E-CB4CCA059FC4}" type="datetimeFigureOut">
               <a:rPr lang="en-US" smtClean="0"/>
-              <a:t>1/27/13</a:t>
+              <a:t>6/26/2026</a:t>
             </a:fld>
             <a:endParaRPr lang="en-US"/>
           </a:p>
@@ -1157,10 +1164,9 @@
           <a:lstStyle/>
           <a:p>
             <a:r>
-              <a:rPr lang="en-US" smtClean="0"/>
+              <a:rPr lang="en-US"/>
               <a:t>Click to edit Master title style</a:t>
             </a:r>
-            <a:endParaRPr lang="en-US"/>
           </a:p>
         </p:txBody>
       </p:sp>
@@ -1214,38 +1220,37 @@
           <a:p>
             <a:pPr lvl="0"/>
             <a:r>
-              <a:rPr lang="en-US" smtClean="0"/>
+              <a:rPr lang="en-US"/>
               <a:t>Click to edit Master text styles</a:t>
             </a:r>
           </a:p>
           <a:p>
             <a:pPr lvl="1"/>
             <a:r>
-              <a:rPr lang="en-US" smtClean="0"/>
+              <a:rPr lang="en-US"/>
               <a:t>Second level</a:t>
             </a:r>
           </a:p>
           <a:p>
             <a:pPr lvl="2"/>
             <a:r>
-              <a:rPr lang="en-US" smtClean="0"/>
+              <a:rPr lang="en-US"/>
               <a:t>Third level</a:t>
             </a:r>
           </a:p>
           <a:p>
             <a:pPr lvl="3"/>
             <a:r>
-              <a:rPr lang="en-US" smtClean="0"/>
+              <a:rPr lang="en-US"/>
               <a:t>Fourth level</a:t>
             </a:r>
           </a:p>
           <a:p>
             <a:pPr lvl="4"/>
             <a:r>
-              <a:rPr lang="en-US" smtClean="0"/>
+              <a:rPr lang="en-US"/>
               <a:t>Fifth level</a:t>
             </a:r>
-            <a:endParaRPr lang="en-US"/>
           </a:p>
         </p:txBody>
       </p:sp>
@@ -1299,38 +1304,37 @@
           <a:p>
             <a:pPr lvl="0"/>
             <a:r>
-              <a:rPr lang="en-US" smtClean="0"/>
+              <a:rPr lang="en-US"/>
               <a:t>Click to edit Master text styles</a:t>
             </a:r>
           </a:p>
           <a:p>
             <a:pPr lvl="1"/>
             <a:r>
-              <a:rPr lang="en-US" smtClean="0"/>
+              <a:rPr lang="en-US"/>
               <a:t>Second level</a:t>
             </a:r>
           </a:p>
           <a:p>
             <a:pPr lvl="2"/>
             <a:r>
-              <a:rPr lang="en-US" smtClean="0"/>
+              <a:rPr lang="en-US"/>
               <a:t>Third level</a:t>
             </a:r>
           </a:p>
           <a:p>
             <a:pPr lvl="3"/>
             <a:r>
-              <a:rPr lang="en-US" smtClean="0"/>
+              <a:rPr lang="en-US"/>
               <a:t>Fourth level</a:t>
             </a:r>
           </a:p>
           <a:p>
             <a:pPr lvl="4"/>
             <a:r>
-              <a:rPr lang="en-US" smtClean="0"/>
+              <a:rPr lang="en-US"/>
               <a:t>Fifth level</a:t>
             </a:r>
-            <a:endParaRPr lang="en-US"/>
           </a:p>
         </p:txBody>
       </p:sp>
@@ -1351,7 +1355,7 @@
           <a:p>
             <a:fld id="{5BCAD085-E8A6-8845-BD4E-CB4CCA059FC4}" type="datetimeFigureOut">
               <a:rPr lang="en-US" smtClean="0"/>
-              <a:t>1/27/13</a:t>
+              <a:t>6/26/2026</a:t>
             </a:fld>
             <a:endParaRPr lang="en-US"/>
           </a:p>
@@ -1449,10 +1453,9 @@
           </a:lstStyle>
           <a:p>
             <a:r>
-              <a:rPr lang="en-US" smtClean="0"/>
+              <a:rPr lang="en-US"/>
               <a:t>Click to edit Master title style</a:t>
             </a:r>
-            <a:endParaRPr lang="en-US"/>
           </a:p>
         </p:txBody>
       </p:sp>
@@ -1515,7 +1518,7 @@
           <a:p>
             <a:pPr lvl="0"/>
             <a:r>
-              <a:rPr lang="en-US" smtClean="0"/>
+              <a:rPr lang="en-US"/>
               <a:t>Click to edit Master text styles</a:t>
             </a:r>
           </a:p>
@@ -1571,38 +1574,37 @@
           <a:p>
             <a:pPr lvl="0"/>
             <a:r>
-              <a:rPr lang="en-US" smtClean="0"/>
+              <a:rPr lang="en-US"/>
               <a:t>Click to edit Master text styles</a:t>
             </a:r>
           </a:p>
           <a:p>
             <a:pPr lvl="1"/>
             <a:r>
-              <a:rPr lang="en-US" smtClean="0"/>
+              <a:rPr lang="en-US"/>
               <a:t>Second level</a:t>
             </a:r>
           </a:p>
           <a:p>
             <a:pPr lvl="2"/>
             <a:r>
-              <a:rPr lang="en-US" smtClean="0"/>
+              <a:rPr lang="en-US"/>
               <a:t>Third level</a:t>
             </a:r>
           </a:p>
           <a:p>
             <a:pPr lvl="3"/>
             <a:r>
-              <a:rPr lang="en-US" smtClean="0"/>
+              <a:rPr lang="en-US"/>
               <a:t>Fourth level</a:t>
             </a:r>
           </a:p>
           <a:p>
             <a:pPr lvl="4"/>
             <a:r>
-              <a:rPr lang="en-US" smtClean="0"/>
+              <a:rPr lang="en-US"/>
               <a:t>Fifth level</a:t>
             </a:r>
-            <a:endParaRPr lang="en-US"/>
           </a:p>
         </p:txBody>
       </p:sp>
@@ -1665,7 +1667,7 @@
           <a:p>
             <a:pPr lvl="0"/>
             <a:r>
-              <a:rPr lang="en-US" smtClean="0"/>
+              <a:rPr lang="en-US"/>
               <a:t>Click to edit Master text styles</a:t>
             </a:r>
           </a:p>
@@ -1721,38 +1723,37 @@
           <a:p>
             <a:pPr lvl="0"/>
             <a:r>
-              <a:rPr lang="en-US" smtClean="0"/>
+              <a:rPr lang="en-US"/>
               <a:t>Click to edit Master text styles</a:t>
             </a:r>
           </a:p>
           <a:p>
             <a:pPr lvl="1"/>
             <a:r>
-              <a:rPr lang="en-US" smtClean="0"/>
+              <a:rPr lang="en-US"/>
               <a:t>Second level</a:t>
             </a:r>
           </a:p>
           <a:p>
             <a:pPr lvl="2"/>
             <a:r>
-              <a:rPr lang="en-US" smtClean="0"/>
+              <a:rPr lang="en-US"/>
               <a:t>Third level</a:t>
             </a:r>
           </a:p>
           <a:p>
             <a:pPr lvl="3"/>
             <a:r>
-              <a:rPr lang="en-US" smtClean="0"/>
+              <a:rPr lang="en-US"/>
               <a:t>Fourth level</a:t>
             </a:r>
           </a:p>
           <a:p>
             <a:pPr lvl="4"/>
             <a:r>
-              <a:rPr lang="en-US" smtClean="0"/>
+              <a:rPr lang="en-US"/>
               <a:t>Fifth level</a:t>
             </a:r>
-            <a:endParaRPr lang="en-US"/>
           </a:p>
         </p:txBody>
       </p:sp>
@@ -1773,7 +1774,7 @@
           <a:p>
             <a:fld id="{5BCAD085-E8A6-8845-BD4E-CB4CCA059FC4}" type="datetimeFigureOut">
               <a:rPr lang="en-US" smtClean="0"/>
-              <a:t>1/27/13</a:t>
+              <a:t>6/26/2026</a:t>
             </a:fld>
             <a:endParaRPr lang="en-US"/>
           </a:p>
@@ -1867,10 +1868,9 @@
           <a:lstStyle/>
           <a:p>
             <a:r>
-              <a:rPr lang="en-US" smtClean="0"/>
+              <a:rPr lang="en-US"/>
               <a:t>Click to edit Master title style</a:t>
             </a:r>
-            <a:endParaRPr lang="en-US"/>
           </a:p>
         </p:txBody>
       </p:sp>
@@ -1891,7 +1891,7 @@
           <a:p>
             <a:fld id="{5BCAD085-E8A6-8845-BD4E-CB4CCA059FC4}" type="datetimeFigureOut">
               <a:rPr lang="en-US" smtClean="0"/>
-              <a:t>1/27/13</a:t>
+              <a:t>6/26/2026</a:t>
             </a:fld>
             <a:endParaRPr lang="en-US"/>
           </a:p>
@@ -1986,7 +1986,7 @@
           <a:p>
             <a:fld id="{5BCAD085-E8A6-8845-BD4E-CB4CCA059FC4}" type="datetimeFigureOut">
               <a:rPr lang="en-US" smtClean="0"/>
-              <a:t>1/27/13</a:t>
+              <a:t>6/26/2026</a:t>
             </a:fld>
             <a:endParaRPr lang="en-US"/>
           </a:p>
@@ -2089,10 +2089,9 @@
           </a:lstStyle>
           <a:p>
             <a:r>
-              <a:rPr lang="en-US" smtClean="0"/>
+              <a:rPr lang="en-US"/>
               <a:t>Click to edit Master title style</a:t>
             </a:r>
-            <a:endParaRPr lang="en-US"/>
           </a:p>
         </p:txBody>
       </p:sp>
@@ -2146,38 +2145,37 @@
           <a:p>
             <a:pPr lvl="0"/>
             <a:r>
-              <a:rPr lang="en-US" smtClean="0"/>
+              <a:rPr lang="en-US"/>
               <a:t>Click to edit Master text styles</a:t>
             </a:r>
           </a:p>
           <a:p>
             <a:pPr lvl="1"/>
             <a:r>
-              <a:rPr lang="en-US" smtClean="0"/>
+              <a:rPr lang="en-US"/>
               <a:t>Second level</a:t>
             </a:r>
           </a:p>
           <a:p>
             <a:pPr lvl="2"/>
             <a:r>
-              <a:rPr lang="en-US" smtClean="0"/>
+              <a:rPr lang="en-US"/>
               <a:t>Third level</a:t>
             </a:r>
           </a:p>
           <a:p>
             <a:pPr lvl="3"/>
             <a:r>
-              <a:rPr lang="en-US" smtClean="0"/>
+              <a:rPr lang="en-US"/>
               <a:t>Fourth level</a:t>
             </a:r>
           </a:p>
           <a:p>
             <a:pPr lvl="4"/>
             <a:r>
-              <a:rPr lang="en-US" smtClean="0"/>
+              <a:rPr lang="en-US"/>
               <a:t>Fifth level</a:t>
             </a:r>
-            <a:endParaRPr lang="en-US"/>
           </a:p>
         </p:txBody>
       </p:sp>
@@ -2240,7 +2238,7 @@
           <a:p>
             <a:pPr lvl="0"/>
             <a:r>
-              <a:rPr lang="en-US" smtClean="0"/>
+              <a:rPr lang="en-US"/>
               <a:t>Click to edit Master text styles</a:t>
             </a:r>
           </a:p>
@@ -2263,7 +2261,7 @@
           <a:p>
             <a:fld id="{5BCAD085-E8A6-8845-BD4E-CB4CCA059FC4}" type="datetimeFigureOut">
               <a:rPr lang="en-US" smtClean="0"/>
-              <a:t>1/27/13</a:t>
+              <a:t>6/26/2026</a:t>
             </a:fld>
             <a:endParaRPr lang="en-US"/>
           </a:p>
@@ -2366,10 +2364,9 @@
           </a:lstStyle>
           <a:p>
             <a:r>
-              <a:rPr lang="en-US" smtClean="0"/>
+              <a:rPr lang="en-US"/>
               <a:t>Click to edit Master title style</a:t>
             </a:r>
-            <a:endParaRPr lang="en-US"/>
           </a:p>
         </p:txBody>
       </p:sp>
@@ -2493,7 +2490,7 @@
           <a:p>
             <a:pPr lvl="0"/>
             <a:r>
-              <a:rPr lang="en-US" smtClean="0"/>
+              <a:rPr lang="en-US"/>
               <a:t>Click to edit Master text styles</a:t>
             </a:r>
           </a:p>
@@ -2516,7 +2513,7 @@
           <a:p>
             <a:fld id="{5BCAD085-E8A6-8845-BD4E-CB4CCA059FC4}" type="datetimeFigureOut">
               <a:rPr lang="en-US" smtClean="0"/>
-              <a:t>1/27/13</a:t>
+              <a:t>6/26/2026</a:t>
             </a:fld>
             <a:endParaRPr lang="en-US"/>
           </a:p>
@@ -2625,10 +2622,9 @@
           <a:lstStyle/>
           <a:p>
             <a:r>
-              <a:rPr lang="en-US" smtClean="0"/>
+              <a:rPr lang="en-US"/>
               <a:t>Click to edit Master title style</a:t>
             </a:r>
-            <a:endParaRPr lang="en-US"/>
           </a:p>
         </p:txBody>
       </p:sp>
@@ -2659,38 +2655,37 @@
           <a:p>
             <a:pPr lvl="0"/>
             <a:r>
-              <a:rPr lang="en-US" smtClean="0"/>
+              <a:rPr lang="en-US"/>
               <a:t>Click to edit Master text styles</a:t>
             </a:r>
           </a:p>
           <a:p>
             <a:pPr lvl="1"/>
             <a:r>
-              <a:rPr lang="en-US" smtClean="0"/>
+              <a:rPr lang="en-US"/>
               <a:t>Second level</a:t>
             </a:r>
           </a:p>
           <a:p>
             <a:pPr lvl="2"/>
             <a:r>
-              <a:rPr lang="en-US" smtClean="0"/>
+              <a:rPr lang="en-US"/>
               <a:t>Third level</a:t>
             </a:r>
           </a:p>
           <a:p>
             <a:pPr lvl="3"/>
             <a:r>
-              <a:rPr lang="en-US" smtClean="0"/>
+              <a:rPr lang="en-US"/>
               <a:t>Fourth level</a:t>
             </a:r>
           </a:p>
           <a:p>
             <a:pPr lvl="4"/>
             <a:r>
-              <a:rPr lang="en-US" smtClean="0"/>
+              <a:rPr lang="en-US"/>
               <a:t>Fifth level</a:t>
             </a:r>
-            <a:endParaRPr lang="en-US"/>
           </a:p>
         </p:txBody>
       </p:sp>
@@ -2729,7 +2724,7 @@
           <a:p>
             <a:fld id="{5BCAD085-E8A6-8845-BD4E-CB4CCA059FC4}" type="datetimeFigureOut">
               <a:rPr lang="en-US" smtClean="0"/>
-              <a:t>1/27/13</a:t>
+              <a:t>6/26/2026</a:t>
             </a:fld>
             <a:endParaRPr lang="en-US"/>
           </a:p>
@@ -3088,7 +3083,7 @@
 </file>
 
 <file path=ppt/slides/slide1.xml><?xml version="1.0" encoding="utf-8"?>
-<p:sld xmlns:a="http://schemas.openxmlformats.org/drawingml/2006/main" xmlns:p="http://schemas.openxmlformats.org/presentationml/2006/main" xmlns:r="http://schemas.openxmlformats.org/officeDocument/2006/relationships">
+<p:sld xmlns:a="http://schemas.openxmlformats.org/drawingml/2006/main" xmlns:r="http://schemas.openxmlformats.org/officeDocument/2006/relationships" xmlns:p="http://schemas.openxmlformats.org/presentationml/2006/main">
   <p:cSld>
     <p:spTree>
       <p:nvGrpSpPr>
@@ -3096,7 +3091,14 @@
         <p:cNvGrpSpPr/>
         <p:nvPr/>
       </p:nvGrpSpPr>
-      <p:grpSpPr/>
+      <p:grpSpPr>
+        <a:xfrm>
+          <a:off x="0" y="0"/>
+          <a:ext cx="0" cy="0"/>
+          <a:chOff x="0" y="0"/>
+          <a:chExt cx="0" cy="0"/>
+        </a:xfrm>
+      </p:grpSpPr>
       <p:sp>
         <p:nvSpPr>
           <p:cNvPr id="2" name="Title 1"/>
@@ -3107,12 +3109,20 @@
             <p:ph type="ctrTitle"/>
           </p:nvPr>
         </p:nvSpPr>
-        <p:spPr/>
-        <p:txBody>
-          <a:bodyPr/>
-          <a:lstStyle/>
-          <a:p>
-            <a:r>
+        <p:spPr>
+          <a:xfrm>
+            <a:off x="685800" y="763849"/>
+            <a:ext cx="7772400" cy="1359053"/>
+          </a:xfrm>
+        </p:spPr>
+        <p:txBody>
+          <a:bodyPr>
+            <a:normAutofit fontScale="90000"/>
+          </a:bodyPr>
+          <a:lstStyle/>
+          <a:p>
+            <a:r>
+              <a:rPr dirty="0"/>
               <a:t>Talent OS: AI-Powered Talent Intelligence</a:t>
             </a:r>
           </a:p>
@@ -3128,23 +3138,35 @@
             <p:ph type="subTitle" idx="1"/>
           </p:nvPr>
         </p:nvSpPr>
-        <p:spPr/>
-        <p:txBody>
-          <a:bodyPr/>
-          <a:lstStyle/>
-          <a:p>
-            <a:r>
+        <p:spPr>
+          <a:xfrm>
+            <a:off x="1371600" y="2519624"/>
+            <a:ext cx="6400800" cy="3348613"/>
+          </a:xfrm>
+        </p:spPr>
+        <p:txBody>
+          <a:bodyPr>
+            <a:normAutofit fontScale="77500" lnSpcReduction="20000"/>
+          </a:bodyPr>
+          <a:lstStyle/>
+          <a:p>
+            <a:r>
+              <a:rPr dirty="0"/>
               <a:t>Team Name: Neural Nexus (or Your Team Name)</a:t>
             </a:r>
           </a:p>
           <a:p>
             <a:r>
+              <a:rPr dirty="0"/>
               <a:t>Team Leader Name: Priyam</a:t>
             </a:r>
           </a:p>
-          <a:p/>
-          <a:p>
-            <a:r>
+          <a:p>
+            <a:endParaRPr dirty="0"/>
+          </a:p>
+          <a:p>
+            <a:r>
+              <a:rPr dirty="0"/>
               <a:t>Problem Statement: ATS systems act as static repositories, forcing recruiters to manually parse unstructured data. This leads to missed 'hidden talent', bias, and an inability to objectively benchmark candidates against dynamic JDs and market standards.</a:t>
             </a:r>
           </a:p>
@@ -3159,7 +3181,7 @@
 </file>
 
 <file path=ppt/slides/slide10.xml><?xml version="1.0" encoding="utf-8"?>
-<p:sld xmlns:a="http://schemas.openxmlformats.org/drawingml/2006/main" xmlns:p="http://schemas.openxmlformats.org/presentationml/2006/main" xmlns:r="http://schemas.openxmlformats.org/officeDocument/2006/relationships">
+<p:sld xmlns:a="http://schemas.openxmlformats.org/drawingml/2006/main" xmlns:r="http://schemas.openxmlformats.org/officeDocument/2006/relationships" xmlns:p="http://schemas.openxmlformats.org/presentationml/2006/main">
   <p:cSld>
     <p:spTree>
       <p:nvGrpSpPr>
@@ -3167,7 +3189,14 @@
         <p:cNvGrpSpPr/>
         <p:nvPr/>
       </p:nvGrpSpPr>
-      <p:grpSpPr/>
+      <p:grpSpPr>
+        <a:xfrm>
+          <a:off x="0" y="0"/>
+          <a:ext cx="0" cy="0"/>
+          <a:chOff x="0" y="0"/>
+          <a:chExt cx="0" cy="0"/>
+        </a:xfrm>
+      </p:grpSpPr>
       <p:sp>
         <p:nvSpPr>
           <p:cNvPr id="2" name="Title 1"/>
@@ -3203,7 +3232,9 @@
         <p:txBody>
           <a:bodyPr/>
           <a:lstStyle/>
-          <a:p/>
+          <a:p>
+            <a:endParaRPr/>
+          </a:p>
           <a:p>
             <a:pPr>
               <a:spcAft>
@@ -3259,7 +3290,7 @@
 </file>
 
 <file path=ppt/slides/slide2.xml><?xml version="1.0" encoding="utf-8"?>
-<p:sld xmlns:a="http://schemas.openxmlformats.org/drawingml/2006/main" xmlns:p="http://schemas.openxmlformats.org/presentationml/2006/main" xmlns:r="http://schemas.openxmlformats.org/officeDocument/2006/relationships">
+<p:sld xmlns:a="http://schemas.openxmlformats.org/drawingml/2006/main" xmlns:r="http://schemas.openxmlformats.org/officeDocument/2006/relationships" xmlns:p="http://schemas.openxmlformats.org/presentationml/2006/main">
   <p:cSld>
     <p:spTree>
       <p:nvGrpSpPr>
@@ -3267,7 +3298,14 @@
         <p:cNvGrpSpPr/>
         <p:nvPr/>
       </p:nvGrpSpPr>
-      <p:grpSpPr/>
+      <p:grpSpPr>
+        <a:xfrm>
+          <a:off x="0" y="0"/>
+          <a:ext cx="0" cy="0"/>
+          <a:chOff x="0" y="0"/>
+          <a:chExt cx="0" cy="0"/>
+        </a:xfrm>
+      </p:grpSpPr>
       <p:sp>
         <p:nvSpPr>
           <p:cNvPr id="2" name="Title 1"/>
@@ -3303,7 +3341,9 @@
         <p:txBody>
           <a:bodyPr/>
           <a:lstStyle/>
-          <a:p/>
+          <a:p>
+            <a:endParaRPr/>
+          </a:p>
           <a:p>
             <a:pPr>
               <a:spcAft>
@@ -3359,7 +3399,7 @@
 </file>
 
 <file path=ppt/slides/slide3.xml><?xml version="1.0" encoding="utf-8"?>
-<p:sld xmlns:a="http://schemas.openxmlformats.org/drawingml/2006/main" xmlns:p="http://schemas.openxmlformats.org/presentationml/2006/main" xmlns:r="http://schemas.openxmlformats.org/officeDocument/2006/relationships">
+<p:sld xmlns:a="http://schemas.openxmlformats.org/drawingml/2006/main" xmlns:r="http://schemas.openxmlformats.org/officeDocument/2006/relationships" xmlns:p="http://schemas.openxmlformats.org/presentationml/2006/main">
   <p:cSld>
     <p:spTree>
       <p:nvGrpSpPr>
@@ -3367,7 +3407,14 @@
         <p:cNvGrpSpPr/>
         <p:nvPr/>
       </p:nvGrpSpPr>
-      <p:grpSpPr/>
+      <p:grpSpPr>
+        <a:xfrm>
+          <a:off x="0" y="0"/>
+          <a:ext cx="0" cy="0"/>
+          <a:chOff x="0" y="0"/>
+          <a:chExt cx="0" cy="0"/>
+        </a:xfrm>
+      </p:grpSpPr>
       <p:sp>
         <p:nvSpPr>
           <p:cNvPr id="2" name="Title 1"/>
@@ -3403,7 +3450,9 @@
         <p:txBody>
           <a:bodyPr/>
           <a:lstStyle/>
-          <a:p/>
+          <a:p>
+            <a:endParaRPr/>
+          </a:p>
           <a:p>
             <a:pPr>
               <a:spcAft>
@@ -3459,7 +3508,7 @@
 </file>
 
 <file path=ppt/slides/slide4.xml><?xml version="1.0" encoding="utf-8"?>
-<p:sld xmlns:a="http://schemas.openxmlformats.org/drawingml/2006/main" xmlns:p="http://schemas.openxmlformats.org/presentationml/2006/main" xmlns:r="http://schemas.openxmlformats.org/officeDocument/2006/relationships">
+<p:sld xmlns:a="http://schemas.openxmlformats.org/drawingml/2006/main" xmlns:r="http://schemas.openxmlformats.org/officeDocument/2006/relationships" xmlns:p="http://schemas.openxmlformats.org/presentationml/2006/main">
   <p:cSld>
     <p:spTree>
       <p:nvGrpSpPr>
@@ -3467,7 +3516,14 @@
         <p:cNvGrpSpPr/>
         <p:nvPr/>
       </p:nvGrpSpPr>
-      <p:grpSpPr/>
+      <p:grpSpPr>
+        <a:xfrm>
+          <a:off x="0" y="0"/>
+          <a:ext cx="0" cy="0"/>
+          <a:chOff x="0" y="0"/>
+          <a:chExt cx="0" cy="0"/>
+        </a:xfrm>
+      </p:grpSpPr>
       <p:sp>
         <p:nvSpPr>
           <p:cNvPr id="2" name="Title 1"/>
@@ -3503,7 +3559,9 @@
         <p:txBody>
           <a:bodyPr/>
           <a:lstStyle/>
-          <a:p/>
+          <a:p>
+            <a:endParaRPr/>
+          </a:p>
           <a:p>
             <a:pPr>
               <a:spcAft>
@@ -3559,7 +3617,7 @@
 </file>
 
 <file path=ppt/slides/slide5.xml><?xml version="1.0" encoding="utf-8"?>
-<p:sld xmlns:a="http://schemas.openxmlformats.org/drawingml/2006/main" xmlns:p="http://schemas.openxmlformats.org/presentationml/2006/main" xmlns:r="http://schemas.openxmlformats.org/officeDocument/2006/relationships">
+<p:sld xmlns:a="http://schemas.openxmlformats.org/drawingml/2006/main" xmlns:r="http://schemas.openxmlformats.org/officeDocument/2006/relationships" xmlns:p="http://schemas.openxmlformats.org/presentationml/2006/main">
   <p:cSld>
     <p:spTree>
       <p:nvGrpSpPr>
@@ -3567,7 +3625,14 @@
         <p:cNvGrpSpPr/>
         <p:nvPr/>
       </p:nvGrpSpPr>
-      <p:grpSpPr/>
+      <p:grpSpPr>
+        <a:xfrm>
+          <a:off x="0" y="0"/>
+          <a:ext cx="0" cy="0"/>
+          <a:chOff x="0" y="0"/>
+          <a:chExt cx="0" cy="0"/>
+        </a:xfrm>
+      </p:grpSpPr>
       <p:sp>
         <p:nvSpPr>
           <p:cNvPr id="2" name="Title 1"/>
@@ -3603,7 +3668,9 @@
         <p:txBody>
           <a:bodyPr/>
           <a:lstStyle/>
-          <a:p/>
+          <a:p>
+            <a:endParaRPr/>
+          </a:p>
           <a:p>
             <a:pPr>
               <a:spcAft>
@@ -3648,7 +3715,7 @@
 </file>
 
 <file path=ppt/slides/slide6.xml><?xml version="1.0" encoding="utf-8"?>
-<p:sld xmlns:a="http://schemas.openxmlformats.org/drawingml/2006/main" xmlns:p="http://schemas.openxmlformats.org/presentationml/2006/main" xmlns:r="http://schemas.openxmlformats.org/officeDocument/2006/relationships">
+<p:sld xmlns:a="http://schemas.openxmlformats.org/drawingml/2006/main" xmlns:r="http://schemas.openxmlformats.org/officeDocument/2006/relationships" xmlns:p="http://schemas.openxmlformats.org/presentationml/2006/main">
   <p:cSld>
     <p:spTree>
       <p:nvGrpSpPr>
@@ -3656,7 +3723,14 @@
         <p:cNvGrpSpPr/>
         <p:nvPr/>
       </p:nvGrpSpPr>
-      <p:grpSpPr/>
+      <p:grpSpPr>
+        <a:xfrm>
+          <a:off x="0" y="0"/>
+          <a:ext cx="0" cy="0"/>
+          <a:chOff x="0" y="0"/>
+          <a:chExt cx="0" cy="0"/>
+        </a:xfrm>
+      </p:grpSpPr>
       <p:sp>
         <p:nvSpPr>
           <p:cNvPr id="2" name="Title 1"/>
@@ -3692,7 +3766,9 @@
         <p:txBody>
           <a:bodyPr/>
           <a:lstStyle/>
-          <a:p/>
+          <a:p>
+            <a:endParaRPr/>
+          </a:p>
           <a:p>
             <a:pPr>
               <a:spcAft>
@@ -3770,7 +3846,7 @@
 </file>
 
 <file path=ppt/slides/slide7.xml><?xml version="1.0" encoding="utf-8"?>
-<p:sld xmlns:a="http://schemas.openxmlformats.org/drawingml/2006/main" xmlns:p="http://schemas.openxmlformats.org/presentationml/2006/main" xmlns:r="http://schemas.openxmlformats.org/officeDocument/2006/relationships">
+<p:sld xmlns:a="http://schemas.openxmlformats.org/drawingml/2006/main" xmlns:r="http://schemas.openxmlformats.org/officeDocument/2006/relationships" xmlns:p="http://schemas.openxmlformats.org/presentationml/2006/main">
   <p:cSld>
     <p:spTree>
       <p:nvGrpSpPr>
@@ -3778,7 +3854,14 @@
         <p:cNvGrpSpPr/>
         <p:nvPr/>
       </p:nvGrpSpPr>
-      <p:grpSpPr/>
+      <p:grpSpPr>
+        <a:xfrm>
+          <a:off x="0" y="0"/>
+          <a:ext cx="0" cy="0"/>
+          <a:chOff x="0" y="0"/>
+          <a:chExt cx="0" cy="0"/>
+        </a:xfrm>
+      </p:grpSpPr>
       <p:sp>
         <p:nvSpPr>
           <p:cNvPr id="2" name="Title 1"/>
@@ -3814,7 +3897,9 @@
         <p:txBody>
           <a:bodyPr/>
           <a:lstStyle/>
-          <a:p/>
+          <a:p>
+            <a:endParaRPr/>
+          </a:p>
           <a:p>
             <a:pPr>
               <a:spcAft>
@@ -3870,7 +3955,7 @@
 </file>
 
 <file path=ppt/slides/slide8.xml><?xml version="1.0" encoding="utf-8"?>
-<p:sld xmlns:a="http://schemas.openxmlformats.org/drawingml/2006/main" xmlns:p="http://schemas.openxmlformats.org/presentationml/2006/main" xmlns:r="http://schemas.openxmlformats.org/officeDocument/2006/relationships">
+<p:sld xmlns:a="http://schemas.openxmlformats.org/drawingml/2006/main" xmlns:r="http://schemas.openxmlformats.org/officeDocument/2006/relationships" xmlns:p="http://schemas.openxmlformats.org/presentationml/2006/main">
   <p:cSld>
     <p:spTree>
       <p:nvGrpSpPr>
@@ -3878,7 +3963,14 @@
         <p:cNvGrpSpPr/>
         <p:nvPr/>
       </p:nvGrpSpPr>
-      <p:grpSpPr/>
+      <p:grpSpPr>
+        <a:xfrm>
+          <a:off x="0" y="0"/>
+          <a:ext cx="0" cy="0"/>
+          <a:chOff x="0" y="0"/>
+          <a:chExt cx="0" cy="0"/>
+        </a:xfrm>
+      </p:grpSpPr>
       <p:sp>
         <p:nvSpPr>
           <p:cNvPr id="2" name="Title 1"/>
@@ -3914,7 +4006,9 @@
         <p:txBody>
           <a:bodyPr/>
           <a:lstStyle/>
-          <a:p/>
+          <a:p>
+            <a:endParaRPr/>
+          </a:p>
           <a:p>
             <a:pPr>
               <a:spcAft>
@@ -3959,7 +4053,7 @@
 </file>
 
 <file path=ppt/slides/slide9.xml><?xml version="1.0" encoding="utf-8"?>
-<p:sld xmlns:a="http://schemas.openxmlformats.org/drawingml/2006/main" xmlns:p="http://schemas.openxmlformats.org/presentationml/2006/main" xmlns:r="http://schemas.openxmlformats.org/officeDocument/2006/relationships">
+<p:sld xmlns:a="http://schemas.openxmlformats.org/drawingml/2006/main" xmlns:r="http://schemas.openxmlformats.org/officeDocument/2006/relationships" xmlns:p="http://schemas.openxmlformats.org/presentationml/2006/main">
   <p:cSld>
     <p:spTree>
       <p:nvGrpSpPr>
@@ -3967,7 +4061,14 @@
         <p:cNvGrpSpPr/>
         <p:nvPr/>
       </p:nvGrpSpPr>
-      <p:grpSpPr/>
+      <p:grpSpPr>
+        <a:xfrm>
+          <a:off x="0" y="0"/>
+          <a:ext cx="0" cy="0"/>
+          <a:chOff x="0" y="0"/>
+          <a:chExt cx="0" cy="0"/>
+        </a:xfrm>
+      </p:grpSpPr>
       <p:sp>
         <p:nvSpPr>
           <p:cNvPr id="2" name="Title 1"/>
@@ -4003,7 +4104,9 @@
         <p:txBody>
           <a:bodyPr/>
           <a:lstStyle/>
-          <a:p/>
+          <a:p>
+            <a:endParaRPr/>
+          </a:p>
           <a:p>
             <a:pPr>
               <a:spcAft>
